--- a/docs/figures/figures.pptx
+++ b/docs/figures/figures.pptx
@@ -208,7 +208,7 @@
           <a:p>
             <a:fld id="{66C4A6C0-F2EC-FC45-B98B-ED31D507F3F3}" type="datetimeFigureOut">
               <a:rPr lang="en-US" smtClean="0"/>
-              <a:t>11/1/25</a:t>
+              <a:t>11/2/25</a:t>
             </a:fld>
             <a:endParaRPr lang="en-US"/>
           </a:p>
@@ -804,7 +804,7 @@
           <a:p>
             <a:fld id="{6E32B2FD-E7C2-BB4E-8CD5-3A0929CC3D5F}" type="datetimeFigureOut">
               <a:rPr lang="en-US" smtClean="0"/>
-              <a:t>11/1/25</a:t>
+              <a:t>11/2/25</a:t>
             </a:fld>
             <a:endParaRPr lang="en-US"/>
           </a:p>
@@ -1002,7 +1002,7 @@
           <a:p>
             <a:fld id="{6E32B2FD-E7C2-BB4E-8CD5-3A0929CC3D5F}" type="datetimeFigureOut">
               <a:rPr lang="en-US" smtClean="0"/>
-              <a:t>11/1/25</a:t>
+              <a:t>11/2/25</a:t>
             </a:fld>
             <a:endParaRPr lang="en-US"/>
           </a:p>
@@ -1210,7 +1210,7 @@
           <a:p>
             <a:fld id="{6E32B2FD-E7C2-BB4E-8CD5-3A0929CC3D5F}" type="datetimeFigureOut">
               <a:rPr lang="en-US" smtClean="0"/>
-              <a:t>11/1/25</a:t>
+              <a:t>11/2/25</a:t>
             </a:fld>
             <a:endParaRPr lang="en-US"/>
           </a:p>
@@ -1408,7 +1408,7 @@
           <a:p>
             <a:fld id="{6E32B2FD-E7C2-BB4E-8CD5-3A0929CC3D5F}" type="datetimeFigureOut">
               <a:rPr lang="en-US" smtClean="0"/>
-              <a:t>11/1/25</a:t>
+              <a:t>11/2/25</a:t>
             </a:fld>
             <a:endParaRPr lang="en-US"/>
           </a:p>
@@ -1683,7 +1683,7 @@
           <a:p>
             <a:fld id="{6E32B2FD-E7C2-BB4E-8CD5-3A0929CC3D5F}" type="datetimeFigureOut">
               <a:rPr lang="en-US" smtClean="0"/>
-              <a:t>11/1/25</a:t>
+              <a:t>11/2/25</a:t>
             </a:fld>
             <a:endParaRPr lang="en-US"/>
           </a:p>
@@ -1948,7 +1948,7 @@
           <a:p>
             <a:fld id="{6E32B2FD-E7C2-BB4E-8CD5-3A0929CC3D5F}" type="datetimeFigureOut">
               <a:rPr lang="en-US" smtClean="0"/>
-              <a:t>11/1/25</a:t>
+              <a:t>11/2/25</a:t>
             </a:fld>
             <a:endParaRPr lang="en-US"/>
           </a:p>
@@ -2360,7 +2360,7 @@
           <a:p>
             <a:fld id="{6E32B2FD-E7C2-BB4E-8CD5-3A0929CC3D5F}" type="datetimeFigureOut">
               <a:rPr lang="en-US" smtClean="0"/>
-              <a:t>11/1/25</a:t>
+              <a:t>11/2/25</a:t>
             </a:fld>
             <a:endParaRPr lang="en-US"/>
           </a:p>
@@ -2501,7 +2501,7 @@
           <a:p>
             <a:fld id="{6E32B2FD-E7C2-BB4E-8CD5-3A0929CC3D5F}" type="datetimeFigureOut">
               <a:rPr lang="en-US" smtClean="0"/>
-              <a:t>11/1/25</a:t>
+              <a:t>11/2/25</a:t>
             </a:fld>
             <a:endParaRPr lang="en-US"/>
           </a:p>
@@ -2614,7 +2614,7 @@
           <a:p>
             <a:fld id="{6E32B2FD-E7C2-BB4E-8CD5-3A0929CC3D5F}" type="datetimeFigureOut">
               <a:rPr lang="en-US" smtClean="0"/>
-              <a:t>11/1/25</a:t>
+              <a:t>11/2/25</a:t>
             </a:fld>
             <a:endParaRPr lang="en-US"/>
           </a:p>
@@ -2925,7 +2925,7 @@
           <a:p>
             <a:fld id="{6E32B2FD-E7C2-BB4E-8CD5-3A0929CC3D5F}" type="datetimeFigureOut">
               <a:rPr lang="en-US" smtClean="0"/>
-              <a:t>11/1/25</a:t>
+              <a:t>11/2/25</a:t>
             </a:fld>
             <a:endParaRPr lang="en-US"/>
           </a:p>
@@ -3213,7 +3213,7 @@
           <a:p>
             <a:fld id="{6E32B2FD-E7C2-BB4E-8CD5-3A0929CC3D5F}" type="datetimeFigureOut">
               <a:rPr lang="en-US" smtClean="0"/>
-              <a:t>11/1/25</a:t>
+              <a:t>11/2/25</a:t>
             </a:fld>
             <a:endParaRPr lang="en-US"/>
           </a:p>
@@ -3454,7 +3454,7 @@
           <a:p>
             <a:fld id="{6E32B2FD-E7C2-BB4E-8CD5-3A0929CC3D5F}" type="datetimeFigureOut">
               <a:rPr lang="en-US" smtClean="0"/>
-              <a:t>11/1/25</a:t>
+              <a:t>11/2/25</a:t>
             </a:fld>
             <a:endParaRPr lang="en-US"/>
           </a:p>
@@ -17387,7 +17387,7 @@
                 </a:solidFill>
                 <a:latin typeface="Avenir Book" panose="02000503020000020003" pitchFamily="2" charset="0"/>
               </a:rPr>
-              <a:t>Celia</a:t>
+              <a:t>celia</a:t>
             </a:r>
           </a:p>
         </p:txBody>
@@ -17457,7 +17457,7 @@
                 </a:solidFill>
                 <a:latin typeface="Avenir Book" panose="02000503020000020003" pitchFamily="2" charset="0"/>
               </a:rPr>
-              <a:t>Cindy</a:t>
+              <a:t>cindy</a:t>
             </a:r>
           </a:p>
         </p:txBody>

--- a/docs/figures/figures.pptx
+++ b/docs/figures/figures.pptx
@@ -4138,7 +4138,7 @@
                   </a:solidFill>
                   <a:latin typeface="Avenir Book" panose="02000503020000020003" pitchFamily="2" charset="0"/>
                 </a:rPr>
-                <a:t>Conny</a:t>
+                <a:t>conny</a:t>
               </a:r>
             </a:p>
           </p:txBody>
@@ -4264,7 +4264,7 @@
                   </a:solidFill>
                   <a:latin typeface="Avenir Book" panose="02000503020000020003" pitchFamily="2" charset="0"/>
                 </a:rPr>
-                <a:t>Carol</a:t>
+                <a:t>carol</a:t>
               </a:r>
             </a:p>
           </p:txBody>
@@ -4390,7 +4390,7 @@
                   </a:solidFill>
                   <a:latin typeface="AVENIR LIGHT OBLIQUE" panose="020B0402020203090204" pitchFamily="34" charset="77"/>
                 </a:rPr>
-                <a:t>Hank</a:t>
+                <a:t>hank</a:t>
               </a:r>
             </a:p>
           </p:txBody>
@@ -4516,7 +4516,7 @@
                   </a:solidFill>
                   <a:latin typeface="AVENIR LIGHT OBLIQUE" panose="020B0402020203090204" pitchFamily="34" charset="77"/>
                 </a:rPr>
-                <a:t>Hugo</a:t>
+                <a:t>hugo</a:t>
               </a:r>
             </a:p>
           </p:txBody>
@@ -5901,7 +5901,7 @@
                 </a:solidFill>
                 <a:latin typeface="Avenir Book" panose="02000503020000020003" pitchFamily="2" charset="0"/>
               </a:rPr>
-              <a:t>Conny</a:t>
+              <a:t>conny</a:t>
             </a:r>
           </a:p>
         </p:txBody>
@@ -6006,7 +6006,7 @@
                 </a:solidFill>
                 <a:latin typeface="Avenir Book" panose="02000503020000020003" pitchFamily="2" charset="0"/>
               </a:rPr>
-              <a:t>Carol</a:t>
+              <a:t>carol</a:t>
             </a:r>
           </a:p>
         </p:txBody>
@@ -6111,7 +6111,7 @@
                 </a:solidFill>
                 <a:latin typeface="AVENIR LIGHT OBLIQUE" panose="020B0402020203090204" pitchFamily="34" charset="77"/>
               </a:rPr>
-              <a:t>Hank</a:t>
+              <a:t>hank</a:t>
             </a:r>
           </a:p>
         </p:txBody>
@@ -6216,7 +6216,7 @@
                 </a:solidFill>
                 <a:latin typeface="AVENIR LIGHT OBLIQUE" panose="020B0402020203090204" pitchFamily="34" charset="77"/>
               </a:rPr>
-              <a:t>Hugo</a:t>
+              <a:t>hugo</a:t>
             </a:r>
           </a:p>
         </p:txBody>
@@ -6442,7 +6442,7 @@
                 </a:solidFill>
                 <a:latin typeface="Avenir Book" panose="02000503020000020003" pitchFamily="2" charset="0"/>
               </a:rPr>
-              <a:t>Patrick</a:t>
+              <a:t>sam</a:t>
             </a:r>
           </a:p>
         </p:txBody>
@@ -6545,14 +6545,20 @@
           <a:p>
             <a:pPr algn="ctr"/>
             <a:r>
-              <a:rPr lang="en-US" sz="1000" dirty="0">
+              <a:rPr lang="en-US" sz="1000" dirty="0" err="1">
                 <a:solidFill>
                   <a:schemeClr val="tx1"/>
                 </a:solidFill>
                 <a:latin typeface="Avenir Book" panose="02000503020000020003" pitchFamily="2" charset="0"/>
               </a:rPr>
-              <a:t>Porter</a:t>
+              <a:t>sofia</a:t>
             </a:r>
+            <a:endParaRPr lang="en-US" sz="1000" dirty="0">
+              <a:solidFill>
+                <a:schemeClr val="tx1"/>
+              </a:solidFill>
+              <a:latin typeface="Avenir Book" panose="02000503020000020003" pitchFamily="2" charset="0"/>
+            </a:endParaRPr>
           </a:p>
         </p:txBody>
       </p:sp>
